--- a/docs/presentation/business-radar.pptx
+++ b/docs/presentation/business-radar.pptx
@@ -116,30 +116,30 @@
   <p:extLst>
     <p:ext uri="{521415D9-36F7-43E2-AB2F-B90AF26B5E84}">
       <p14:sectionLst xmlns:p14="http://schemas.microsoft.com/office/powerpoint/2010/main">
-        <p14:section name="Начало" id="{ce79b584-4daf-7d81-d095-4323763fb2b8}">
+        <p14:section name="Начало" id="{fcd63b3d-bbda-f094-d63e-d75cfe5f70c6}">
           <p14:sldIdLst>
             <p14:sldId id="256"/>
           </p14:sldIdLst>
         </p14:section>
-        <p14:section name="Задача и решение" id="{86552dea-0240-ac01-e4e1-13c6a5b04c77}">
+        <p14:section name="Задача и решение" id="{d8938c88-6eb0-ccb8-bf76-0eb62eedf1dd}">
           <p14:sldIdLst>
             <p14:sldId id="257"/>
             <p14:sldId id="258"/>
           </p14:sldIdLst>
         </p14:section>
-        <p14:section name="Продукт" id="{629bbaa4-60cd-1455-244d-8bb2d50c0fa6}">
+        <p14:section name="Продукт" id="{39382b3a-94be-92a1-4c01-0c2eaeca6d0d}">
           <p14:sldIdLst>
             <p14:sldId id="259"/>
             <p14:sldId id="260"/>
           </p14:sldIdLst>
         </p14:section>
-        <p14:section name="Доказательства" id="{464c0838-664a-a851-ff95-bb609e5786a8}">
+        <p14:section name="Доказательства" id="{8d458d08-4eb5-3ef4-4d90-b34376a6d70b}">
           <p14:sldIdLst>
             <p14:sldId id="261"/>
             <p14:sldId id="262"/>
           </p14:sldIdLst>
         </p14:section>
-        <p14:section name="Внедрение" id="{6ed7d284-2ad7-e554-3508-5a0cf4b8c515}">
+        <p14:section name="Внедрение" id="{506d38c5-c256-e9f9-0550-eab33a9b05f7}">
           <p14:sldIdLst>
             <p14:sldId id="263"/>
             <p14:sldId id="264"/>
@@ -5102,7 +5102,7 @@
                   <a:srgbClr val="EF3124"/>
                 </a:solidFill>
               </a:rPr>
-              <a:t>17 с</a:t>
+              <a:t>0,2 с · ~50 с</a:t>
             </a:r>
             <a:endParaRPr lang="en-US" sz="4000" dirty="0"/>
           </a:p>
@@ -5138,7 +5138,7 @@
                   <a:schemeClr val="tx2"/>
                 </a:solidFill>
               </a:rPr>
-              <a:t>медиана полного разбора</a:t>
+              <a:t>готовый разбор · новый с нуля (замер стенда)</a:t>
             </a:r>
             <a:endParaRPr lang="en-US" sz="1500" dirty="0"/>
           </a:p>
@@ -6084,7 +6084,7 @@
                   <a:srgbClr val="2B2B30"/>
                 </a:solidFill>
               </a:rPr>
-              <a:t>Независимые LLM-судьи на 20 разборах (из 5): GLM 3,64, Kimi 3,15; совпадение ±1 балл — 95–100% по осям.</a:t>
+              <a:t>Независимые LLM-судьи на 20 разборах (из 5): GLM 3,86, Kimi 3,33; совпадение ±1 балл — 90–100% по осям; цель 4,2 пока не достигнута.</a:t>
             </a:r>
             <a:endParaRPr lang="en-US" sz="1500" dirty="0"/>
           </a:p>
